--- a/lf10-kundenvielfalt/Kundenvielfalt_LF10.pptx
+++ b/lf10-kundenvielfalt/Kundenvielfalt_LF10.pptx
@@ -126,13 +126,13 @@
   <p:extLst>
     <p:ext uri="{521415D9-36F7-43E2-AB2F-B90AF26B5E84}">
       <p14:sectionLst xmlns:p14="http://schemas.microsoft.com/office/powerpoint/2010/main">
-        <p14:section name="Start" id="{1ff28e69-c2a5-467b-511f-b7d4d99976ad}">
+        <p14:section name="Start" id="{48c23ccd-9365-7036-0e95-30dc2c2e34b1}">
           <p14:sldIdLst>
             <p14:sldId id="256"/>
             <p14:sldId id="257"/>
           </p14:sldIdLst>
         </p14:section>
-        <p14:section name="Kundengruppen" id="{a86536a5-a3a5-7e6f-b91b-8c862e68c7e7}">
+        <p14:section name="Kundengruppen" id="{fafa1166-386e-067a-4e0b-30ae3c00902d}">
           <p14:sldIdLst>
             <p14:sldId id="258"/>
             <p14:sldId id="259"/>
@@ -140,7 +140,7 @@
             <p14:sldId id="261"/>
           </p14:sldIdLst>
         </p14:section>
-        <p14:section name="Altersgruppen" id="{703c06d0-b37c-a3c5-c49c-79cba26961be}">
+        <p14:section name="Altersgruppen" id="{e934f70e-8daa-c29c-c80e-1639a558f322}">
           <p14:sldIdLst>
             <p14:sldId id="262"/>
             <p14:sldId id="263"/>
@@ -149,13 +149,13 @@
             <p14:sldId id="266"/>
           </p14:sldIdLst>
         </p14:section>
-        <p14:section name="Internationale Kunden" id="{762c976f-b3fd-03d9-8ab7-8dc881cc78be}">
+        <p14:section name="Internationale Kunden" id="{3cbbf9a3-9921-4553-6cf9-9478836e0646}">
           <p14:sldIdLst>
             <p14:sldId id="267"/>
             <p14:sldId id="268"/>
           </p14:sldIdLst>
         </p14:section>
-        <p14:section name="Kundentypen" id="{9daa4045-ab2d-ab66-55d4-3ca1d5e6947a}">
+        <p14:section name="Kundentypen" id="{a3f34a7f-d64f-284c-9997-31b54e07aeb8}">
           <p14:sldIdLst>
             <p14:sldId id="269"/>
             <p14:sldId id="270"/>
@@ -165,7 +165,7 @@
             <p14:sldId id="274"/>
           </p14:sldIdLst>
         </p14:section>
-        <p14:section name="Abschluss" id="{e7c3399e-0021-7e08-3a62-d492e34c5cd3}">
+        <p14:section name="Abschluss" id="{34e6ae5a-ee07-5904-5279-9a56cde05e35}">
           <p14:sldIdLst>
             <p14:sldId id="275"/>
           </p14:sldIdLst>
@@ -10956,7 +10956,7 @@
                   <a:schemeClr val="tx1"/>
                 </a:solidFill>
               </a:rPr>
-              <a:t>Wie Sie helfen, steht im Buch auf S. 178.</a:t>
+              <a:t>Wenige Artikel vorlegen, Vor- und Nachteile klar gegenüberstellen, Empfehlung geben.</a:t>
             </a:r>
             <a:endParaRPr lang="en-US" sz="1700" dirty="0"/>
           </a:p>
